--- a/Just File Manager.pptx
+++ b/Just File Manager.pptx
@@ -385,7 +385,7 @@
           <a:p>
             <a:fld id="{2DB4C836-C734-4108-B06B-2BF7534ED2C8}" type="datetimeFigureOut">
               <a:rPr lang="ru-RU" smtClean="0"/>
-              <a:t>05.04.2026</a:t>
+              <a:t>18.04.2026</a:t>
             </a:fld>
             <a:endParaRPr lang="ru-RU"/>
           </a:p>
@@ -593,7 +593,7 @@
           <a:p>
             <a:fld id="{2DB4C836-C734-4108-B06B-2BF7534ED2C8}" type="datetimeFigureOut">
               <a:rPr lang="ru-RU" smtClean="0"/>
-              <a:t>05.04.2026</a:t>
+              <a:t>18.04.2026</a:t>
             </a:fld>
             <a:endParaRPr lang="ru-RU"/>
           </a:p>
@@ -849,7 +849,7 @@
           <a:p>
             <a:fld id="{2DB4C836-C734-4108-B06B-2BF7534ED2C8}" type="datetimeFigureOut">
               <a:rPr lang="ru-RU" smtClean="0"/>
-              <a:t>05.04.2026</a:t>
+              <a:t>18.04.2026</a:t>
             </a:fld>
             <a:endParaRPr lang="ru-RU"/>
           </a:p>
@@ -1023,7 +1023,7 @@
           <a:p>
             <a:fld id="{2DB4C836-C734-4108-B06B-2BF7534ED2C8}" type="datetimeFigureOut">
               <a:rPr lang="ru-RU" smtClean="0"/>
-              <a:t>05.04.2026</a:t>
+              <a:t>18.04.2026</a:t>
             </a:fld>
             <a:endParaRPr lang="ru-RU"/>
           </a:p>
@@ -1366,7 +1366,7 @@
           <a:p>
             <a:fld id="{2DB4C836-C734-4108-B06B-2BF7534ED2C8}" type="datetimeFigureOut">
               <a:rPr lang="ru-RU" smtClean="0"/>
-              <a:t>05.04.2026</a:t>
+              <a:t>18.04.2026</a:t>
             </a:fld>
             <a:endParaRPr lang="ru-RU"/>
           </a:p>
@@ -1641,7 +1641,7 @@
           <a:p>
             <a:fld id="{2DB4C836-C734-4108-B06B-2BF7534ED2C8}" type="datetimeFigureOut">
               <a:rPr lang="ru-RU" smtClean="0"/>
-              <a:t>05.04.2026</a:t>
+              <a:t>18.04.2026</a:t>
             </a:fld>
             <a:endParaRPr lang="ru-RU"/>
           </a:p>
@@ -2020,7 +2020,7 @@
           <a:p>
             <a:fld id="{2DB4C836-C734-4108-B06B-2BF7534ED2C8}" type="datetimeFigureOut">
               <a:rPr lang="ru-RU" smtClean="0"/>
-              <a:t>05.04.2026</a:t>
+              <a:t>18.04.2026</a:t>
             </a:fld>
             <a:endParaRPr lang="ru-RU"/>
           </a:p>
@@ -2138,7 +2138,7 @@
           <a:p>
             <a:fld id="{2DB4C836-C734-4108-B06B-2BF7534ED2C8}" type="datetimeFigureOut">
               <a:rPr lang="ru-RU" smtClean="0"/>
-              <a:t>05.04.2026</a:t>
+              <a:t>18.04.2026</a:t>
             </a:fld>
             <a:endParaRPr lang="ru-RU"/>
           </a:p>
@@ -2309,7 +2309,7 @@
           <a:p>
             <a:fld id="{2DB4C836-C734-4108-B06B-2BF7534ED2C8}" type="datetimeFigureOut">
               <a:rPr lang="ru-RU" smtClean="0"/>
-              <a:t>05.04.2026</a:t>
+              <a:t>18.04.2026</a:t>
             </a:fld>
             <a:endParaRPr lang="ru-RU"/>
           </a:p>
@@ -2663,7 +2663,7 @@
           <a:p>
             <a:fld id="{2DB4C836-C734-4108-B06B-2BF7534ED2C8}" type="datetimeFigureOut">
               <a:rPr lang="ru-RU" smtClean="0"/>
-              <a:t>05.04.2026</a:t>
+              <a:t>18.04.2026</a:t>
             </a:fld>
             <a:endParaRPr lang="ru-RU"/>
           </a:p>
@@ -3045,7 +3045,7 @@
           <a:p>
             <a:fld id="{2DB4C836-C734-4108-B06B-2BF7534ED2C8}" type="datetimeFigureOut">
               <a:rPr lang="ru-RU" smtClean="0"/>
-              <a:t>05.04.2026</a:t>
+              <a:t>18.04.2026</a:t>
             </a:fld>
             <a:endParaRPr lang="ru-RU"/>
           </a:p>
@@ -3332,7 +3332,7 @@
           <a:p>
             <a:fld id="{2DB4C836-C734-4108-B06B-2BF7534ED2C8}" type="datetimeFigureOut">
               <a:rPr lang="ru-RU" smtClean="0"/>
-              <a:t>05.04.2026</a:t>
+              <a:t>18.04.2026</a:t>
             </a:fld>
             <a:endParaRPr lang="ru-RU"/>
           </a:p>
@@ -5108,7 +5108,7 @@
                 <a:latin typeface="Arial" panose="020B0604020202020204" pitchFamily="34" charset="0"/>
                 <a:cs typeface="Arial" panose="020B0604020202020204" pitchFamily="34" charset="0"/>
               </a:rPr>
-              <a:t>Вот схема реализации на 3 недели:</a:t>
+              <a:t>Вот схема реализации на 3 года:</a:t>
             </a:r>
           </a:p>
         </p:txBody>
@@ -5186,8 +5186,8 @@
         </p:nvSpPr>
         <p:spPr>
           <a:xfrm>
-            <a:off x="1650998" y="3116818"/>
-            <a:ext cx="1371600" cy="369332"/>
+            <a:off x="1926163" y="3073943"/>
+            <a:ext cx="821270" cy="369332"/>
           </a:xfrm>
           <a:prstGeom prst="rect">
             <a:avLst/>
@@ -5204,7 +5204,7 @@
               <a:rPr lang="ru-RU" dirty="0">
                 <a:latin typeface="Arial Black" panose="020B0A04020102020204" pitchFamily="34" charset="0"/>
               </a:rPr>
-              <a:t>1 неделя</a:t>
+              <a:t>2026</a:t>
             </a:r>
           </a:p>
         </p:txBody>
@@ -5247,41 +5247,6 @@
           </a:fontRef>
         </p:style>
       </p:cxnSp>
-      <p:sp>
-        <p:nvSpPr>
-          <p:cNvPr id="10" name="TextBox 9">
-            <a:extLst>
-              <a:ext uri="{FF2B5EF4-FFF2-40B4-BE49-F238E27FC236}">
-                <a16:creationId xmlns:a16="http://schemas.microsoft.com/office/drawing/2014/main" id="{E3525017-256A-4151-A29E-875DF600CF22}"/>
-              </a:ext>
-            </a:extLst>
-          </p:cNvPr>
-          <p:cNvSpPr txBox="1"/>
-          <p:nvPr/>
-        </p:nvSpPr>
-        <p:spPr>
-          <a:xfrm>
-            <a:off x="966786" y="3571902"/>
-            <a:ext cx="2740025" cy="646331"/>
-          </a:xfrm>
-          <a:prstGeom prst="rect">
-            <a:avLst/>
-          </a:prstGeom>
-          <a:noFill/>
-        </p:spPr>
-        <p:txBody>
-          <a:bodyPr wrap="square" rtlCol="0">
-            <a:spAutoFit/>
-          </a:bodyPr>
-          <a:lstStyle/>
-          <a:p>
-            <a:r>
-              <a:rPr lang="ru-RU" dirty="0"/>
-              <a:t>Доработка основного функционала</a:t>
-            </a:r>
-          </a:p>
-        </p:txBody>
-      </p:sp>
       <p:sp>
         <p:nvSpPr>
           <p:cNvPr id="13" name="Прямоугольник 12">
@@ -5400,8 +5365,8 @@
         </p:nvSpPr>
         <p:spPr>
           <a:xfrm>
-            <a:off x="5405437" y="3116818"/>
-            <a:ext cx="1381125" cy="369332"/>
+            <a:off x="5654569" y="3075956"/>
+            <a:ext cx="809096" cy="369332"/>
           </a:xfrm>
           <a:prstGeom prst="rect">
             <a:avLst/>
@@ -5415,16 +5380,10 @@
           <a:lstStyle/>
           <a:p>
             <a:r>
-              <a:rPr lang="en-US" dirty="0">
-                <a:latin typeface="Arial Black" panose="020B0A04020102020204" pitchFamily="34" charset="0"/>
-              </a:rPr>
-              <a:t>2 </a:t>
-            </a:r>
-            <a:r>
               <a:rPr lang="ru-RU" dirty="0">
                 <a:latin typeface="Arial Black" panose="020B0A04020102020204" pitchFamily="34" charset="0"/>
               </a:rPr>
-              <a:t>неделя</a:t>
+              <a:t>2027</a:t>
             </a:r>
           </a:p>
         </p:txBody>
@@ -5467,41 +5426,6 @@
           </a:fontRef>
         </p:style>
       </p:cxnSp>
-      <p:sp>
-        <p:nvSpPr>
-          <p:cNvPr id="20" name="TextBox 19">
-            <a:extLst>
-              <a:ext uri="{FF2B5EF4-FFF2-40B4-BE49-F238E27FC236}">
-                <a16:creationId xmlns:a16="http://schemas.microsoft.com/office/drawing/2014/main" id="{440A9A1D-6900-49E5-A09A-2678D4C2A9E3}"/>
-              </a:ext>
-            </a:extLst>
-          </p:cNvPr>
-          <p:cNvSpPr txBox="1"/>
-          <p:nvPr/>
-        </p:nvSpPr>
-        <p:spPr>
-          <a:xfrm>
-            <a:off x="4725988" y="3566945"/>
-            <a:ext cx="2666258" cy="646331"/>
-          </a:xfrm>
-          <a:prstGeom prst="rect">
-            <a:avLst/>
-          </a:prstGeom>
-          <a:noFill/>
-        </p:spPr>
-        <p:txBody>
-          <a:bodyPr wrap="square" rtlCol="0">
-            <a:spAutoFit/>
-          </a:bodyPr>
-          <a:lstStyle/>
-          <a:p>
-            <a:r>
-              <a:rPr lang="ru-RU" dirty="0"/>
-              <a:t>Создание графического интерфейса</a:t>
-            </a:r>
-          </a:p>
-        </p:txBody>
-      </p:sp>
       <p:sp>
         <p:nvSpPr>
           <p:cNvPr id="21" name="Прямоугольник 20">
@@ -5617,8 +5541,8 @@
         </p:nvSpPr>
         <p:spPr>
           <a:xfrm>
-            <a:off x="9159875" y="3116818"/>
-            <a:ext cx="1381125" cy="369332"/>
+            <a:off x="9442767" y="3077687"/>
+            <a:ext cx="847725" cy="369332"/>
           </a:xfrm>
           <a:prstGeom prst="rect">
             <a:avLst/>
@@ -5635,19 +5559,7 @@
               <a:rPr lang="ru-RU" dirty="0">
                 <a:latin typeface="Arial Black" panose="020B0A04020102020204" pitchFamily="34" charset="0"/>
               </a:rPr>
-              <a:t>3</a:t>
-            </a:r>
-            <a:r>
-              <a:rPr lang="en-US" dirty="0">
-                <a:latin typeface="Arial Black" panose="020B0A04020102020204" pitchFamily="34" charset="0"/>
-              </a:rPr>
-              <a:t> </a:t>
-            </a:r>
-            <a:r>
-              <a:rPr lang="ru-RU" dirty="0">
-                <a:latin typeface="Arial Black" panose="020B0A04020102020204" pitchFamily="34" charset="0"/>
-              </a:rPr>
-              <a:t>неделя</a:t>
+              <a:t>2028</a:t>
             </a:r>
           </a:p>
         </p:txBody>
@@ -5704,8 +5616,8 @@
         </p:nvSpPr>
         <p:spPr>
           <a:xfrm>
-            <a:off x="8912859" y="3582639"/>
-            <a:ext cx="2057400" cy="646331"/>
+            <a:off x="8930641" y="3582639"/>
+            <a:ext cx="2057400" cy="369332"/>
           </a:xfrm>
           <a:prstGeom prst="rect">
             <a:avLst/>
@@ -5718,9 +5630,124 @@
           </a:bodyPr>
           <a:lstStyle/>
           <a:p>
+            <a:endParaRPr lang="ru-RU" dirty="0"/>
+          </a:p>
+        </p:txBody>
+      </p:sp>
+      <p:sp>
+        <p:nvSpPr>
+          <p:cNvPr id="8" name="TextBox 7">
+            <a:extLst>
+              <a:ext uri="{FF2B5EF4-FFF2-40B4-BE49-F238E27FC236}">
+                <a16:creationId xmlns:a16="http://schemas.microsoft.com/office/drawing/2014/main" id="{DF21DD57-A488-46B7-AE9E-44284A25B4FB}"/>
+              </a:ext>
+            </a:extLst>
+          </p:cNvPr>
+          <p:cNvSpPr txBox="1"/>
+          <p:nvPr/>
+        </p:nvSpPr>
+        <p:spPr>
+          <a:xfrm>
+            <a:off x="4892462" y="3582639"/>
+            <a:ext cx="2443057" cy="646331"/>
+          </a:xfrm>
+          <a:prstGeom prst="rect">
+            <a:avLst/>
+          </a:prstGeom>
+          <a:noFill/>
+        </p:spPr>
+        <p:txBody>
+          <a:bodyPr wrap="square" rtlCol="0">
+            <a:spAutoFit/>
+          </a:bodyPr>
+          <a:lstStyle/>
+          <a:p>
             <a:r>
               <a:rPr lang="ru-RU" dirty="0"/>
-              <a:t>Подготовка к защите проекта</a:t>
+              <a:t>Совместимость с</a:t>
+            </a:r>
+            <a:r>
+              <a:rPr lang="en-US" dirty="0"/>
+              <a:t> Linux</a:t>
+            </a:r>
+            <a:r>
+              <a:rPr lang="ru-RU" dirty="0"/>
+              <a:t> и </a:t>
+            </a:r>
+            <a:r>
+              <a:rPr lang="en-US" dirty="0"/>
+              <a:t>MacOS</a:t>
+            </a:r>
+            <a:endParaRPr lang="ru-RU" dirty="0"/>
+          </a:p>
+        </p:txBody>
+      </p:sp>
+      <p:sp>
+        <p:nvSpPr>
+          <p:cNvPr id="11" name="TextBox 10">
+            <a:extLst>
+              <a:ext uri="{FF2B5EF4-FFF2-40B4-BE49-F238E27FC236}">
+                <a16:creationId xmlns:a16="http://schemas.microsoft.com/office/drawing/2014/main" id="{2B2BCB25-F07C-4855-8F4C-698042B5453C}"/>
+              </a:ext>
+            </a:extLst>
+          </p:cNvPr>
+          <p:cNvSpPr txBox="1"/>
+          <p:nvPr/>
+        </p:nvSpPr>
+        <p:spPr>
+          <a:xfrm>
+            <a:off x="920855" y="3582639"/>
+            <a:ext cx="2721185" cy="584775"/>
+          </a:xfrm>
+          <a:prstGeom prst="rect">
+            <a:avLst/>
+          </a:prstGeom>
+          <a:noFill/>
+        </p:spPr>
+        <p:txBody>
+          <a:bodyPr wrap="square" rtlCol="0">
+            <a:spAutoFit/>
+          </a:bodyPr>
+          <a:lstStyle/>
+          <a:p>
+            <a:r>
+              <a:rPr lang="ru-RU" sz="1600" dirty="0"/>
+              <a:t>Исправление багов, добавление новых функций.</a:t>
+            </a:r>
+          </a:p>
+        </p:txBody>
+      </p:sp>
+      <p:sp>
+        <p:nvSpPr>
+          <p:cNvPr id="12" name="TextBox 11">
+            <a:extLst>
+              <a:ext uri="{FF2B5EF4-FFF2-40B4-BE49-F238E27FC236}">
+                <a16:creationId xmlns:a16="http://schemas.microsoft.com/office/drawing/2014/main" id="{12A4AC21-2C6F-4CCA-83DC-99FD42DD8CAC}"/>
+              </a:ext>
+            </a:extLst>
+          </p:cNvPr>
+          <p:cNvSpPr txBox="1"/>
+          <p:nvPr/>
+        </p:nvSpPr>
+        <p:spPr>
+          <a:xfrm>
+            <a:off x="8586469" y="3593918"/>
+            <a:ext cx="2560320" cy="646331"/>
+          </a:xfrm>
+          <a:prstGeom prst="rect">
+            <a:avLst/>
+          </a:prstGeom>
+          <a:noFill/>
+        </p:spPr>
+        <p:txBody>
+          <a:bodyPr wrap="square" rtlCol="0">
+            <a:spAutoFit/>
+          </a:bodyPr>
+          <a:lstStyle/>
+          <a:p>
+            <a:r>
+              <a:rPr lang="ru-RU" dirty="0"/>
+              <a:t>Добавление работы с облачным хранилищем</a:t>
             </a:r>
           </a:p>
         </p:txBody>
